--- a/Docs/Cinematic/Project_MJS_Cinematic_Editor_Guide.pptx
+++ b/Docs/Cinematic/Project_MJS_Cinematic_Editor_Guide.pptx
@@ -8340,7 +8340,7 @@
               </a:defRPr>
             </a:pPr>
             <a:r>
-              <a:rPr sz="1275" b="1">
+              <a:rPr sz="1275" b="1" dirty="0">
                 <a:solidFill>
                   <a:srgbClr val="152033"/>
                 </a:solidFill>
@@ -8352,7 +8352,7 @@
             </a:r>
           </a:p>
           <a:p>
-            <a:endParaRPr sz="1275" b="1">
+            <a:endParaRPr sz="1275" b="1" dirty="0">
               <a:solidFill>
                 <a:srgbClr val="152033"/>
               </a:solidFill>
@@ -8373,42 +8373,28 @@
               </a:defRPr>
             </a:pPr>
             <a:r>
-              <a:rPr sz="1275" b="1">
-                <a:solidFill>
-                  <a:srgbClr val="152033"/>
-                </a:solidFill>
-                <a:latin typeface="나눔스퀘어 네오 Bold" panose="00000800000000000000" pitchFamily="2" charset="-127"/>
-                <a:ea typeface="나눔스퀘어 네오 Bold" panose="00000800000000000000" pitchFamily="2" charset="-127"/>
-                <a:cs typeface="Malgun Gothic"/>
-              </a:rPr>
-              <a:t>Actor Binding 우클릭</a:t>
-            </a:r>
-          </a:p>
-          <a:p>
-            <a:pPr algn="ctr">
-              <a:defRPr sz="1275" b="1">
-                <a:solidFill>
-                  <a:srgbClr val="152033"/>
-                </a:solidFill>
-                <a:latin typeface="Malgun Gothic"/>
-                <a:ea typeface="Malgun Gothic"/>
-                <a:cs typeface="Malgun Gothic"/>
-              </a:defRPr>
-            </a:pPr>
-            <a:r>
-              <a:rPr sz="1275" b="1">
-                <a:solidFill>
-                  <a:srgbClr val="152033"/>
-                </a:solidFill>
-                <a:latin typeface="나눔스퀘어 네오 Bold" panose="00000800000000000000" pitchFamily="2" charset="-127"/>
-                <a:ea typeface="나눔스퀘어 네오 Bold" panose="00000800000000000000" pitchFamily="2" charset="-127"/>
-                <a:cs typeface="Malgun Gothic"/>
-              </a:rPr>
-              <a:t>Tags...</a:t>
-            </a:r>
-          </a:p>
-          <a:p>
-            <a:endParaRPr sz="1275" b="1">
+              <a:rPr sz="1275" b="1" dirty="0">
+                <a:solidFill>
+                  <a:srgbClr val="152033"/>
+                </a:solidFill>
+                <a:latin typeface="나눔스퀘어 네오 Bold" panose="00000800000000000000" pitchFamily="2" charset="-127"/>
+                <a:ea typeface="나눔스퀘어 네오 Bold" panose="00000800000000000000" pitchFamily="2" charset="-127"/>
+                <a:cs typeface="Malgun Gothic"/>
+              </a:rPr>
+              <a:t>Actor Binding </a:t>
+            </a:r>
+            <a:r>
+              <a:rPr sz="1275" b="1" dirty="0" err="1">
+                <a:solidFill>
+                  <a:srgbClr val="152033"/>
+                </a:solidFill>
+                <a:latin typeface="나눔스퀘어 네오 Bold" panose="00000800000000000000" pitchFamily="2" charset="-127"/>
+                <a:ea typeface="나눔스퀘어 네오 Bold" panose="00000800000000000000" pitchFamily="2" charset="-127"/>
+                <a:cs typeface="Malgun Gothic"/>
+              </a:rPr>
+              <a:t>우클릭</a:t>
+            </a:r>
+            <a:endParaRPr sz="1275" b="1" dirty="0">
               <a:solidFill>
                 <a:srgbClr val="152033"/>
               </a:solidFill>
@@ -8429,16 +8415,26 @@
               </a:defRPr>
             </a:pPr>
             <a:r>
-              <a:rPr sz="1275" b="1">
-                <a:solidFill>
-                  <a:srgbClr val="152033"/>
-                </a:solidFill>
-                <a:latin typeface="나눔스퀘어 네오 Bold" panose="00000800000000000000" pitchFamily="2" charset="-127"/>
-                <a:ea typeface="나눔스퀘어 네오 Bold" panose="00000800000000000000" pitchFamily="2" charset="-127"/>
-                <a:cs typeface="Malgun Gothic"/>
-              </a:rPr>
-              <a:t>Player</a:t>
-            </a:r>
+              <a:rPr sz="1275" b="1" dirty="0">
+                <a:solidFill>
+                  <a:srgbClr val="152033"/>
+                </a:solidFill>
+                <a:latin typeface="나눔스퀘어 네오 Bold" panose="00000800000000000000" pitchFamily="2" charset="-127"/>
+                <a:ea typeface="나눔스퀘어 네오 Bold" panose="00000800000000000000" pitchFamily="2" charset="-127"/>
+                <a:cs typeface="Malgun Gothic"/>
+              </a:rPr>
+              <a:t>Tags...</a:t>
+            </a:r>
+          </a:p>
+          <a:p>
+            <a:endParaRPr sz="1275" b="1" dirty="0">
+              <a:solidFill>
+                <a:srgbClr val="152033"/>
+              </a:solidFill>
+              <a:latin typeface="나눔스퀘어 네오 Bold" panose="00000800000000000000" pitchFamily="2" charset="-127"/>
+              <a:ea typeface="나눔스퀘어 네오 Bold" panose="00000800000000000000" pitchFamily="2" charset="-127"/>
+              <a:cs typeface="Malgun Gothic"/>
+            </a:endParaRPr>
           </a:p>
           <a:p>
             <a:pPr algn="ctr">
@@ -8452,15 +8448,15 @@
               </a:defRPr>
             </a:pPr>
             <a:r>
-              <a:rPr sz="1275" b="1">
-                <a:solidFill>
-                  <a:srgbClr val="152033"/>
-                </a:solidFill>
-                <a:latin typeface="나눔스퀘어 네오 Bold" panose="00000800000000000000" pitchFamily="2" charset="-127"/>
-                <a:ea typeface="나눔스퀘어 네오 Bold" panose="00000800000000000000" pitchFamily="2" charset="-127"/>
-                <a:cs typeface="Malgun Gothic"/>
-              </a:rPr>
-              <a:t>Target</a:t>
+              <a:rPr sz="1275" b="1" dirty="0">
+                <a:solidFill>
+                  <a:srgbClr val="152033"/>
+                </a:solidFill>
+                <a:latin typeface="나눔스퀘어 네오 Bold" panose="00000800000000000000" pitchFamily="2" charset="-127"/>
+                <a:ea typeface="나눔스퀘어 네오 Bold" panose="00000800000000000000" pitchFamily="2" charset="-127"/>
+                <a:cs typeface="Malgun Gothic"/>
+              </a:rPr>
+              <a:t>Player</a:t>
             </a:r>
           </a:p>
           <a:p>
@@ -8475,7 +8471,30 @@
               </a:defRPr>
             </a:pPr>
             <a:r>
-              <a:rPr sz="1275" b="1">
+              <a:rPr sz="1275" b="1" dirty="0">
+                <a:solidFill>
+                  <a:srgbClr val="152033"/>
+                </a:solidFill>
+                <a:latin typeface="나눔스퀘어 네오 Bold" panose="00000800000000000000" pitchFamily="2" charset="-127"/>
+                <a:ea typeface="나눔스퀘어 네오 Bold" panose="00000800000000000000" pitchFamily="2" charset="-127"/>
+                <a:cs typeface="Malgun Gothic"/>
+              </a:rPr>
+              <a:t>Target</a:t>
+            </a:r>
+          </a:p>
+          <a:p>
+            <a:pPr algn="ctr">
+              <a:defRPr sz="1275" b="1">
+                <a:solidFill>
+                  <a:srgbClr val="152033"/>
+                </a:solidFill>
+                <a:latin typeface="Malgun Gothic"/>
+                <a:ea typeface="Malgun Gothic"/>
+                <a:cs typeface="Malgun Gothic"/>
+              </a:defRPr>
+            </a:pPr>
+            <a:r>
+              <a:rPr sz="1275" b="1" dirty="0">
                 <a:solidFill>
                   <a:srgbClr val="152033"/>
                 </a:solidFill>
